--- a/ppt/ch10-1 新音乐初放-学堂乐歌.pptx
+++ b/ppt/ch10-1 新音乐初放-学堂乐歌.pptx
@@ -3203,7 +3203,7 @@
       </p:sp>
       <p:pic>
         <p:nvPicPr>
-          <p:cNvPr id="5" name="Picture 4" descr="school-badge-display.png"/>
+          <p:cNvPr id="5" name="Picture 4" descr="school-logo.png"/>
           <p:cNvPicPr>
             <a:picLocks noChangeAspect="1"/>
           </p:cNvPicPr>
@@ -3217,8 +3217,32 @@
         </p:blipFill>
         <p:spPr>
           <a:xfrm>
-            <a:off x="10332720" y="457200"/>
-            <a:ext cx="1371600" cy="182458"/>
+            <a:off x="10515600" y="411480"/>
+            <a:ext cx="1051560" cy="1051560"/>
+          </a:xfrm>
+          <a:prstGeom prst="rect">
+            <a:avLst/>
+          </a:prstGeom>
+        </p:spPr>
+      </p:pic>
+      <p:pic>
+        <p:nvPicPr>
+          <p:cNvPr id="6" name="Picture 5" descr="school-name.png"/>
+          <p:cNvPicPr>
+            <a:picLocks noChangeAspect="1"/>
+          </p:cNvPicPr>
+          <p:nvPr/>
+        </p:nvPicPr>
+        <p:blipFill>
+          <a:blip r:embed="rId3"/>
+          <a:stretch>
+            <a:fillRect/>
+          </a:stretch>
+        </p:blipFill>
+        <p:spPr>
+          <a:xfrm>
+            <a:off x="640080" y="4297680"/>
+            <a:ext cx="2743200" cy="739739"/>
           </a:xfrm>
           <a:prstGeom prst="rect">
             <a:avLst/>
@@ -3962,7 +3986,7 @@
                 </a:solidFill>
                 <a:latin typeface="Microsoft YaHei"/>
               </a:rPr>
-              <a:t>• 学堂乐歌（填词歌曲传统）：清末民初新学堂唱歌课中教唱的歌曲，多数是在现成曲调上填新词（少数为创作歌曲），内容多为富国强兵、抵御外侮等题材。 - W…</a:t>
+              <a:t>• 学堂乐歌（填词歌曲传统）：清末民初新学堂唱歌课中教唱的歌曲，多数是在现成曲调上填新词（少数为创作歌曲），内容多为富国强兵、抵御外侮等题材。 - 何…</a:t>
             </a:r>
           </a:p>
           <a:p>
@@ -3978,7 +4002,7 @@
                 </a:solidFill>
                 <a:latin typeface="Microsoft YaHei"/>
               </a:rPr>
-              <a:t>• 大型声乐套曲（合唱套曲）：由若干对比乐章组成、围绕统一主题的大型声乐作品，如《黄河大合唱》以黄河为背景展开史诗性叙事。 - When to use…</a:t>
+              <a:t>• 大型声乐套曲（合唱套曲）：由若干对比乐章组成、围绕统一主题的大型声乐作品，如《黄河大合唱》以黄河为背景展开史诗性叙事。 - 何时使用： 分析多乐章…</a:t>
             </a:r>
           </a:p>
           <a:p>
